--- a/crampon_pitch.pptx
+++ b/crampon_pitch.pptx
@@ -863,7 +863,7 @@
           <a:p>
             <a:r>
               <a:rPr lang="en-US" dirty="0"/>
-              <a:t>Four axes of randomisation, all of them the mountain rather than the lab: ice friction, cold stiffened joints, sagging servo gain, and wind as a sustained drag force rather than a push.</a:t>
+              <a:t>Four axes of randomization, all of them the mountain rather than the lab: ice friction, cold stiffened joints, sagging servo gain, and wind as a sustained drag force rather than a push.</a:t>
             </a:r>
             <a:endParaRPr lang="en-US" dirty="0"/>
           </a:p>
@@ -951,7 +951,7 @@
           <a:p>
             <a:r>
               <a:rPr lang="en-US" dirty="0"/>
-              <a:t>This is the intellectual contribution. Wide randomisation on its own diverges. Learn on normal ground, warm start onto annealed ice with clipped observations, and keep full wind for evaluation only.</a:t>
+              <a:t>This is the intellectual contribution. Wide randomization on its own diverges. Learn on normal ground, warm start onto annealed ice with clipped observations, and keep full wind for evaluation only.</a:t>
             </a:r>
             <a:endParaRPr lang="en-US" dirty="0"/>
           </a:p>
@@ -1716,7 +1716,7 @@
           </a:prstGeom>
           <a:solidFill>
             <a:srgbClr val="04101C">
-              <a:alpha val="68000"/>
+              <a:alpha val="70000"/>
             </a:srgbClr>
           </a:solidFill>
           <a:ln/>
@@ -1724,29 +1724,7 @@
       </p:sp>
       <p:sp>
         <p:nvSpPr>
-          <p:cNvPr id="4" name="Shape 1"/>
-          <p:cNvSpPr/>
-          <p:nvPr/>
-        </p:nvSpPr>
-        <p:spPr>
-          <a:xfrm>
-            <a:off x="0" y="3566160"/>
-            <a:ext cx="12191695" cy="3291840"/>
-          </a:xfrm>
-          <a:prstGeom prst="rect">
-            <a:avLst/>
-          </a:prstGeom>
-          <a:solidFill>
-            <a:srgbClr val="04101C">
-              <a:alpha val="58000"/>
-            </a:srgbClr>
-          </a:solidFill>
-          <a:ln/>
-        </p:spPr>
-      </p:sp>
-      <p:sp>
-        <p:nvSpPr>
-          <p:cNvPr id="5" name="Text 2"/>
+          <p:cNvPr id="4" name="Text 1"/>
           <p:cNvSpPr txBox="1"/>
           <p:nvPr/>
         </p:nvSpPr>
@@ -1785,7 +1763,7 @@
       </p:sp>
       <p:sp>
         <p:nvSpPr>
-          <p:cNvPr id="6" name="Text 3"/>
+          <p:cNvPr id="5" name="Text 2"/>
           <p:cNvSpPr txBox="1"/>
           <p:nvPr/>
         </p:nvSpPr>
@@ -1824,7 +1802,7 @@
       </p:sp>
       <p:sp>
         <p:nvSpPr>
-          <p:cNvPr id="7" name="Text 4"/>
+          <p:cNvPr id="6" name="Text 3"/>
           <p:cNvSpPr txBox="1"/>
           <p:nvPr/>
         </p:nvSpPr>
@@ -1872,7 +1850,7 @@
             <a:r>
               <a:rPr lang="en-US" sz="1450" b="1" dirty="0">
                 <a:solidFill>
-                  <a:srgbClr val="35A0F0"/>
+                  <a:srgbClr val="F2F8FC"/>
                 </a:solidFill>
                 <a:latin typeface="Calibri" pitchFamily="34" charset="0"/>
                 <a:ea typeface="Calibri" pitchFamily="34" charset="-122"/>
@@ -1886,7 +1864,7 @@
       </p:sp>
       <p:sp>
         <p:nvSpPr>
-          <p:cNvPr id="8" name="Text 5"/>
+          <p:cNvPr id="7" name="Text 4"/>
           <p:cNvSpPr txBox="1"/>
           <p:nvPr/>
         </p:nvSpPr>
@@ -1925,7 +1903,7 @@
       </p:sp>
       <p:sp>
         <p:nvSpPr>
-          <p:cNvPr id="9" name="Text 6"/>
+          <p:cNvPr id="8" name="Text 5"/>
           <p:cNvSpPr txBox="1"/>
           <p:nvPr/>
         </p:nvSpPr>
@@ -1948,9 +1926,9 @@
               <a:buNone/>
             </a:pPr>
             <a:r>
-              <a:rPr lang="en-US" sz="1100" dirty="0">
-                <a:solidFill>
-                  <a:srgbClr val="35A0F0"/>
+              <a:rPr lang="en-US" sz="1100" b="1" dirty="0">
+                <a:solidFill>
+                  <a:srgbClr val="F2F8FC"/>
                 </a:solidFill>
                 <a:latin typeface="Calibri" pitchFamily="34" charset="0"/>
                 <a:ea typeface="Calibri" pitchFamily="34" charset="-122"/>
@@ -2034,7 +2012,7 @@
           </a:prstGeom>
           <a:solidFill>
             <a:srgbClr val="04101C">
-              <a:alpha val="84000"/>
+              <a:alpha val="76000"/>
             </a:srgbClr>
           </a:solidFill>
           <a:ln/>
@@ -2126,12 +2104,12 @@
         </p:nvSpPr>
         <p:spPr>
           <a:xfrm>
-            <a:off x="548640" y="1572768"/>
-            <a:ext cx="5468112" cy="1664208"/>
+            <a:off x="548640" y="1517904"/>
+            <a:ext cx="5468112" cy="1572768"/>
           </a:xfrm>
           <a:prstGeom prst="roundRect">
             <a:avLst>
-              <a:gd name="adj" fmla="val 3297"/>
+              <a:gd name="adj" fmla="val 3488"/>
             </a:avLst>
           </a:prstGeom>
           <a:solidFill>
@@ -2153,8 +2131,8 @@
         </p:nvSpPr>
         <p:spPr>
           <a:xfrm>
-            <a:off x="822960" y="1737360"/>
-            <a:ext cx="4937760" cy="329184"/>
+            <a:off x="822960" y="1682496"/>
+            <a:ext cx="4937760" cy="310896"/>
           </a:xfrm>
           <a:prstGeom prst="rect">
             <a:avLst/>
@@ -2192,8 +2170,8 @@
         </p:nvSpPr>
         <p:spPr>
           <a:xfrm>
-            <a:off x="822960" y="2121408"/>
-            <a:ext cx="4937760" cy="969264"/>
+            <a:off x="822960" y="2048256"/>
+            <a:ext cx="4937760" cy="914400"/>
           </a:xfrm>
           <a:prstGeom prst="rect">
             <a:avLst/>
@@ -2234,12 +2212,12 @@
         </p:nvSpPr>
         <p:spPr>
           <a:xfrm>
-            <a:off x="6172200" y="1572768"/>
-            <a:ext cx="5468112" cy="1664208"/>
+            <a:off x="6172200" y="1517904"/>
+            <a:ext cx="5468112" cy="1572768"/>
           </a:xfrm>
           <a:prstGeom prst="roundRect">
             <a:avLst>
-              <a:gd name="adj" fmla="val 3297"/>
+              <a:gd name="adj" fmla="val 3488"/>
             </a:avLst>
           </a:prstGeom>
           <a:solidFill>
@@ -2261,8 +2239,8 @@
         </p:nvSpPr>
         <p:spPr>
           <a:xfrm>
-            <a:off x="6446520" y="1737360"/>
-            <a:ext cx="4937760" cy="329184"/>
+            <a:off x="6446520" y="1682496"/>
+            <a:ext cx="4937760" cy="310896"/>
           </a:xfrm>
           <a:prstGeom prst="rect">
             <a:avLst/>
@@ -2300,8 +2278,8 @@
         </p:nvSpPr>
         <p:spPr>
           <a:xfrm>
-            <a:off x="6446520" y="2121408"/>
-            <a:ext cx="4937760" cy="969264"/>
+            <a:off x="6446520" y="2048256"/>
+            <a:ext cx="4937760" cy="914400"/>
           </a:xfrm>
           <a:prstGeom prst="rect">
             <a:avLst/>
@@ -2328,7 +2306,7 @@
                 <a:ea typeface="Calibri" pitchFamily="34" charset="-122"/>
                 <a:cs typeface="Calibri" pitchFamily="34" charset="-120"/>
               </a:rPr>
-              <a:t>Ice, cold stiffened joints, sagging servo gain and sustained 8000 m wind, learned through a curriculum because naive randomisation diverges.</a:t>
+              <a:t>Ice, cold stiffened joints, sagging servo gain and sustained 8000 m wind, learned through a curriculum because naive randomization diverges.</a:t>
             </a:r>
             <a:endParaRPr lang="en-US" sz="1200" dirty="0"/>
           </a:p>
@@ -2342,12 +2320,12 @@
         </p:nvSpPr>
         <p:spPr>
           <a:xfrm>
-            <a:off x="548640" y="3419856"/>
-            <a:ext cx="5468112" cy="1664208"/>
+            <a:off x="548640" y="3273552"/>
+            <a:ext cx="5468112" cy="1572768"/>
           </a:xfrm>
           <a:prstGeom prst="roundRect">
             <a:avLst>
-              <a:gd name="adj" fmla="val 3297"/>
+              <a:gd name="adj" fmla="val 3488"/>
             </a:avLst>
           </a:prstGeom>
           <a:solidFill>
@@ -2369,8 +2347,8 @@
         </p:nvSpPr>
         <p:spPr>
           <a:xfrm>
-            <a:off x="822960" y="3584448"/>
-            <a:ext cx="4937760" cy="329184"/>
+            <a:off x="822960" y="3438144"/>
+            <a:ext cx="4937760" cy="310896"/>
           </a:xfrm>
           <a:prstGeom prst="rect">
             <a:avLst/>
@@ -2408,8 +2386,8 @@
         </p:nvSpPr>
         <p:spPr>
           <a:xfrm>
-            <a:off x="822960" y="3968496"/>
-            <a:ext cx="4937760" cy="969264"/>
+            <a:off x="822960" y="3803904"/>
+            <a:ext cx="4937760" cy="914400"/>
           </a:xfrm>
           <a:prstGeom prst="rect">
             <a:avLst/>
@@ -2450,12 +2428,12 @@
         </p:nvSpPr>
         <p:spPr>
           <a:xfrm>
-            <a:off x="6172200" y="3419856"/>
-            <a:ext cx="5468112" cy="1664208"/>
+            <a:off x="6172200" y="3273552"/>
+            <a:ext cx="5468112" cy="1572768"/>
           </a:xfrm>
           <a:prstGeom prst="roundRect">
             <a:avLst>
-              <a:gd name="adj" fmla="val 3297"/>
+              <a:gd name="adj" fmla="val 3488"/>
             </a:avLst>
           </a:prstGeom>
           <a:solidFill>
@@ -2477,8 +2455,8 @@
         </p:nvSpPr>
         <p:spPr>
           <a:xfrm>
-            <a:off x="6446520" y="3584448"/>
-            <a:ext cx="4937760" cy="329184"/>
+            <a:off x="6446520" y="3438144"/>
+            <a:ext cx="4937760" cy="310896"/>
           </a:xfrm>
           <a:prstGeom prst="rect">
             <a:avLst/>
@@ -2516,8 +2494,8 @@
         </p:nvSpPr>
         <p:spPr>
           <a:xfrm>
-            <a:off x="6446520" y="3968496"/>
-            <a:ext cx="4937760" cy="969264"/>
+            <a:off x="6446520" y="3803904"/>
+            <a:ext cx="4937760" cy="914400"/>
           </a:xfrm>
           <a:prstGeom prst="rect">
             <a:avLst/>
@@ -2558,8 +2536,8 @@
         </p:nvSpPr>
         <p:spPr>
           <a:xfrm>
-            <a:off x="548640" y="5440680"/>
-            <a:ext cx="6400800" cy="365760"/>
+            <a:off x="548640" y="5230368"/>
+            <a:ext cx="6400800" cy="384048"/>
           </a:xfrm>
           <a:prstGeom prst="rect">
             <a:avLst/>
@@ -2575,7 +2553,7 @@
               <a:buNone/>
             </a:pPr>
             <a:r>
-              <a:rPr lang="en-US" sz="1600" b="1" dirty="0">
+              <a:rPr lang="en-US" sz="1700" b="1" dirty="0">
                 <a:solidFill>
                   <a:srgbClr val="F2F8FC"/>
                 </a:solidFill>
@@ -2585,7 +2563,7 @@
               </a:rPr>
               <a:t>github.com/zubair480/crampon</a:t>
             </a:r>
-            <a:endParaRPr lang="en-US" sz="1600" dirty="0"/>
+            <a:endParaRPr lang="en-US" sz="1700" dirty="0"/>
           </a:p>
         </p:txBody>
       </p:sp>
@@ -2597,8 +2575,8 @@
         </p:nvSpPr>
         <p:spPr>
           <a:xfrm>
-            <a:off x="5852160" y="5440680"/>
-            <a:ext cx="5788152" cy="365760"/>
+            <a:off x="5852160" y="5230368"/>
+            <a:ext cx="5788152" cy="384048"/>
           </a:xfrm>
           <a:prstGeom prst="rect">
             <a:avLst/>
@@ -3146,7 +3124,7 @@
                 <a:ea typeface="Calibri" pitchFamily="34" charset="-122"/>
                 <a:cs typeface="Calibri" pitchFamily="34" charset="-120"/>
               </a:rPr>
-              <a:t>Identical conditions for both policies: same wind, same cold, same 24 seeds. Metric: steps survived of 500 before the torso tips past horizontal.</a:t>
+              <a:t>Metric: steps survived of 500 before the torso tips past horizontal.  ·  24 seeds per friction level.</a:t>
             </a:r>
             <a:endParaRPr lang="en-US" sz="950" dirty="0"/>
           </a:p>
@@ -3330,7 +3308,7 @@
                 <a:gridCol w="1645920"/>
                 <a:gridCol w="1508760"/>
               </a:tblGrid>
-              <a:tr h="457200">
+              <a:tr h="566928">
                 <a:tc>
                   <a:txBody>
                     <a:bodyPr/>
@@ -3552,7 +3530,7 @@
                   </a:tcPr>
                 </a:tc>
               </a:tr>
-              <a:tr h="457200">
+              <a:tr h="566928">
                 <a:tc>
                   <a:txBody>
                     <a:bodyPr/>
@@ -3774,7 +3752,7 @@
                   </a:tcPr>
                 </a:tc>
               </a:tr>
-              <a:tr h="457200">
+              <a:tr h="566928">
                 <a:tc>
                   <a:txBody>
                     <a:bodyPr/>
@@ -3996,7 +3974,7 @@
                   </a:tcPr>
                 </a:tc>
               </a:tr>
-              <a:tr h="457200">
+              <a:tr h="566928">
                 <a:tc>
                   <a:txBody>
                     <a:bodyPr/>
@@ -4218,7 +4196,7 @@
                   </a:tcPr>
                 </a:tc>
               </a:tr>
-              <a:tr h="457200">
+              <a:tr h="566928">
                 <a:tc>
                   <a:txBody>
                     <a:bodyPr/>
@@ -4440,7 +4418,7 @@
                   </a:tcPr>
                 </a:tc>
               </a:tr>
-              <a:tr h="457200">
+              <a:tr h="566928">
                 <a:tc>
                   <a:txBody>
                     <a:bodyPr/>
@@ -4662,7 +4640,7 @@
                   </a:tcPr>
                 </a:tc>
               </a:tr>
-              <a:tr h="457200">
+              <a:tr h="566928">
                 <a:tc>
                   <a:txBody>
                     <a:bodyPr/>
@@ -4884,7 +4862,7 @@
                   </a:tcPr>
                 </a:tc>
               </a:tr>
-              <a:tr h="457200">
+              <a:tr h="566928">
                 <a:tc>
                   <a:txBody>
                     <a:bodyPr/>
@@ -5118,7 +5096,7 @@
         </p:nvSpPr>
         <p:spPr>
           <a:xfrm>
-            <a:off x="8275320" y="1417320"/>
+            <a:off x="8275320" y="1481328"/>
             <a:ext cx="3364992" cy="1481328"/>
           </a:xfrm>
           <a:prstGeom prst="roundRect">
@@ -5145,7 +5123,7 @@
         </p:nvSpPr>
         <p:spPr>
           <a:xfrm>
-            <a:off x="8485632" y="1581912"/>
+            <a:off x="8485632" y="1645920"/>
             <a:ext cx="2944368" cy="292608"/>
           </a:xfrm>
           <a:prstGeom prst="rect">
@@ -5184,7 +5162,7 @@
         </p:nvSpPr>
         <p:spPr>
           <a:xfrm>
-            <a:off x="8485632" y="1911096"/>
+            <a:off x="8485632" y="1975104"/>
             <a:ext cx="2944368" cy="841248"/>
           </a:xfrm>
           <a:prstGeom prst="rect">
@@ -5226,7 +5204,7 @@
         </p:nvSpPr>
         <p:spPr>
           <a:xfrm>
-            <a:off x="8275320" y="3054096"/>
+            <a:off x="8275320" y="3118104"/>
             <a:ext cx="3364992" cy="1481328"/>
           </a:xfrm>
           <a:prstGeom prst="roundRect">
@@ -5253,7 +5231,7 @@
         </p:nvSpPr>
         <p:spPr>
           <a:xfrm>
-            <a:off x="8485632" y="3218688"/>
+            <a:off x="8485632" y="3282696"/>
             <a:ext cx="2944368" cy="292608"/>
           </a:xfrm>
           <a:prstGeom prst="rect">
@@ -5292,7 +5270,7 @@
         </p:nvSpPr>
         <p:spPr>
           <a:xfrm>
-            <a:off x="8485632" y="3547872"/>
+            <a:off x="8485632" y="3611880"/>
             <a:ext cx="2944368" cy="841248"/>
           </a:xfrm>
           <a:prstGeom prst="rect">
@@ -5334,7 +5312,7 @@
         </p:nvSpPr>
         <p:spPr>
           <a:xfrm>
-            <a:off x="8275320" y="4690872"/>
+            <a:off x="8275320" y="4754880"/>
             <a:ext cx="3364992" cy="1481328"/>
           </a:xfrm>
           <a:prstGeom prst="roundRect">
@@ -5361,7 +5339,7 @@
         </p:nvSpPr>
         <p:spPr>
           <a:xfrm>
-            <a:off x="8485632" y="4855464"/>
+            <a:off x="8485632" y="4919472"/>
             <a:ext cx="2944368" cy="292608"/>
           </a:xfrm>
           <a:prstGeom prst="rect">
@@ -5400,7 +5378,7 @@
         </p:nvSpPr>
         <p:spPr>
           <a:xfrm>
-            <a:off x="8485632" y="5184648"/>
+            <a:off x="8485632" y="5248656"/>
             <a:ext cx="2944368" cy="841248"/>
           </a:xfrm>
           <a:prstGeom prst="rect">
@@ -5428,7 +5406,7 @@
                 <a:ea typeface="Calibri" pitchFamily="34" charset="-122"/>
                 <a:cs typeface="Calibri" pitchFamily="34" charset="-120"/>
               </a:rPr>
-              <a:t>MuJoCo Playground samples floor friction from U(0.4, 1.0). The mountain lives an order of magnitude below.</a:t>
+              <a:t>MuJoCo Playground samples floor friction from U(0.4, 1.0). The mountain sits entirely below that band.</a:t>
             </a:r>
             <a:endParaRPr lang="en-US" sz="1050" dirty="0"/>
           </a:p>
@@ -5630,12 +5608,12 @@
         </p:nvSpPr>
         <p:spPr>
           <a:xfrm>
-            <a:off x="548640" y="1417320"/>
-            <a:ext cx="5349240" cy="1572768"/>
+            <a:off x="548640" y="1481328"/>
+            <a:ext cx="5349240" cy="1298448"/>
           </a:xfrm>
           <a:prstGeom prst="roundRect">
             <a:avLst>
-              <a:gd name="adj" fmla="val 3488"/>
+              <a:gd name="adj" fmla="val 4225"/>
             </a:avLst>
           </a:prstGeom>
           <a:solidFill>
@@ -5657,7 +5635,7 @@
         </p:nvSpPr>
         <p:spPr>
           <a:xfrm>
-            <a:off x="804672" y="1563624"/>
+            <a:off x="804672" y="1627632"/>
             <a:ext cx="4837176" cy="310896"/>
           </a:xfrm>
           <a:prstGeom prst="rect">
@@ -5696,7 +5674,7 @@
         </p:nvSpPr>
         <p:spPr>
           <a:xfrm>
-            <a:off x="804672" y="1920240"/>
+            <a:off x="804672" y="1984248"/>
             <a:ext cx="4837176" cy="932688"/>
           </a:xfrm>
           <a:prstGeom prst="rect">
@@ -5738,12 +5716,12 @@
         </p:nvSpPr>
         <p:spPr>
           <a:xfrm>
-            <a:off x="6291072" y="1417320"/>
-            <a:ext cx="5349240" cy="1572768"/>
+            <a:off x="6291072" y="1481328"/>
+            <a:ext cx="5349240" cy="1298448"/>
           </a:xfrm>
           <a:prstGeom prst="roundRect">
             <a:avLst>
-              <a:gd name="adj" fmla="val 3488"/>
+              <a:gd name="adj" fmla="val 4225"/>
             </a:avLst>
           </a:prstGeom>
           <a:solidFill>
@@ -5765,7 +5743,7 @@
         </p:nvSpPr>
         <p:spPr>
           <a:xfrm>
-            <a:off x="6547104" y="1563624"/>
+            <a:off x="6547104" y="1627632"/>
             <a:ext cx="4837176" cy="310896"/>
           </a:xfrm>
           <a:prstGeom prst="rect">
@@ -5804,7 +5782,7 @@
         </p:nvSpPr>
         <p:spPr>
           <a:xfrm>
-            <a:off x="6547104" y="1920240"/>
+            <a:off x="6547104" y="1984248"/>
             <a:ext cx="4837176" cy="932688"/>
           </a:xfrm>
           <a:prstGeom prst="rect">
@@ -5846,12 +5824,12 @@
         </p:nvSpPr>
         <p:spPr>
           <a:xfrm>
-            <a:off x="548640" y="3191256"/>
-            <a:ext cx="5349240" cy="1572768"/>
+            <a:off x="548640" y="2999232"/>
+            <a:ext cx="5349240" cy="1298448"/>
           </a:xfrm>
           <a:prstGeom prst="roundRect">
             <a:avLst>
-              <a:gd name="adj" fmla="val 3488"/>
+              <a:gd name="adj" fmla="val 4225"/>
             </a:avLst>
           </a:prstGeom>
           <a:solidFill>
@@ -5873,7 +5851,7 @@
         </p:nvSpPr>
         <p:spPr>
           <a:xfrm>
-            <a:off x="804672" y="3337560"/>
+            <a:off x="804672" y="3145536"/>
             <a:ext cx="4837176" cy="310896"/>
           </a:xfrm>
           <a:prstGeom prst="rect">
@@ -5912,7 +5890,7 @@
         </p:nvSpPr>
         <p:spPr>
           <a:xfrm>
-            <a:off x="804672" y="3694176"/>
+            <a:off x="804672" y="3502152"/>
             <a:ext cx="4837176" cy="932688"/>
           </a:xfrm>
           <a:prstGeom prst="rect">
@@ -5954,12 +5932,12 @@
         </p:nvSpPr>
         <p:spPr>
           <a:xfrm>
-            <a:off x="6291072" y="3191256"/>
-            <a:ext cx="5349240" cy="1572768"/>
+            <a:off x="6291072" y="2999232"/>
+            <a:ext cx="5349240" cy="1298448"/>
           </a:xfrm>
           <a:prstGeom prst="roundRect">
             <a:avLst>
-              <a:gd name="adj" fmla="val 3488"/>
+              <a:gd name="adj" fmla="val 4225"/>
             </a:avLst>
           </a:prstGeom>
           <a:solidFill>
@@ -5981,7 +5959,7 @@
         </p:nvSpPr>
         <p:spPr>
           <a:xfrm>
-            <a:off x="6547104" y="3337560"/>
+            <a:off x="6547104" y="3145536"/>
             <a:ext cx="4837176" cy="310896"/>
           </a:xfrm>
           <a:prstGeom prst="rect">
@@ -6020,7 +5998,7 @@
         </p:nvSpPr>
         <p:spPr>
           <a:xfrm>
-            <a:off x="6547104" y="3694176"/>
+            <a:off x="6547104" y="3502152"/>
             <a:ext cx="4837176" cy="932688"/>
           </a:xfrm>
           <a:prstGeom prst="rect">
@@ -6062,12 +6040,12 @@
         </p:nvSpPr>
         <p:spPr>
           <a:xfrm>
-            <a:off x="548640" y="4983480"/>
-            <a:ext cx="11094415" cy="1280160"/>
+            <a:off x="548640" y="4526280"/>
+            <a:ext cx="11094415" cy="1691640"/>
           </a:xfrm>
           <a:prstGeom prst="roundRect">
             <a:avLst>
-              <a:gd name="adj" fmla="val 4286"/>
+              <a:gd name="adj" fmla="val 3243"/>
             </a:avLst>
           </a:prstGeom>
           <a:solidFill>
@@ -6089,8 +6067,8 @@
         </p:nvSpPr>
         <p:spPr>
           <a:xfrm>
-            <a:off x="822960" y="5120640"/>
-            <a:ext cx="4297680" cy="731520"/>
+            <a:off x="841248" y="4709160"/>
+            <a:ext cx="4023360" cy="1325880"/>
           </a:xfrm>
           <a:prstGeom prst="rect">
             <a:avLst/>
@@ -6106,7 +6084,7 @@
               <a:buNone/>
             </a:pPr>
             <a:r>
-              <a:rPr lang="en-US" sz="1900" b="1" dirty="0">
+              <a:rPr lang="en-US" sz="2100" b="1" dirty="0">
                 <a:solidFill>
                   <a:srgbClr val="F2F8FC"/>
                 </a:solidFill>
@@ -6116,7 +6094,7 @@
               </a:rPr>
               <a:t>348 N of wind against a 327 N robot</a:t>
             </a:r>
-            <a:endParaRPr lang="en-US" sz="1900" dirty="0"/>
+            <a:endParaRPr lang="en-US" sz="2100" dirty="0"/>
           </a:p>
         </p:txBody>
       </p:sp>
@@ -6128,27 +6106,27 @@
         </p:nvSpPr>
         <p:spPr>
           <a:xfrm>
-            <a:off x="5029200" y="5102352"/>
-            <a:ext cx="6492240" cy="1042416"/>
-          </a:xfrm>
-          <a:prstGeom prst="rect">
-            <a:avLst/>
-          </a:prstGeom>
-          <a:noFill/>
-          <a:ln/>
-        </p:spPr>
-        <p:txBody>
-          <a:bodyPr wrap="square" lIns="0" tIns="0" rIns="0" bIns="0" rtlCol="0" anchor="t"/>
+            <a:off x="4892040" y="4709160"/>
+            <a:ext cx="6629400" cy="1325880"/>
+          </a:xfrm>
+          <a:prstGeom prst="rect">
+            <a:avLst/>
+          </a:prstGeom>
+          <a:noFill/>
+          <a:ln/>
+        </p:spPr>
+        <p:txBody>
+          <a:bodyPr wrap="square" lIns="0" tIns="0" rIns="0" bIns="0" rtlCol="0" anchor="ctr"/>
           <a:lstStyle/>
           <a:p>
             <a:pPr indent="0" marL="0">
               <a:lnSpc>
-                <a:spcPct val="115000"/>
+                <a:spcPct val="118000"/>
               </a:lnSpc>
               <a:buNone/>
             </a:pPr>
             <a:r>
-              <a:rPr lang="en-US" sz="1100" dirty="0">
+              <a:rPr lang="en-US" sz="1150" dirty="0">
                 <a:solidFill>
                   <a:srgbClr val="A9C8DF"/>
                 </a:solidFill>
@@ -6158,7 +6136,7 @@
               </a:rPr>
               <a:t>ρ = 0.45 kg/m³, the air density at about 8000 m, near a third of sea level. At 200 km/h the drag force is a sideways shove slightly harder than gravity, and it is sustained rather than the instantaneous impulse that push_config applies. Surviving a kick is a different skill from leaning into a headwind.</a:t>
             </a:r>
-            <a:endParaRPr lang="en-US" sz="1100" dirty="0"/>
+            <a:endParaRPr lang="en-US" sz="1150" dirty="0"/>
           </a:p>
         </p:txBody>
       </p:sp>
@@ -6344,7 +6322,7 @@
                 <a:ea typeface="Cambria" pitchFamily="34" charset="-122"/>
                 <a:cs typeface="Cambria" pitchFamily="34" charset="-120"/>
               </a:rPr>
-              <a:t>Naive domain randomisation fails. A curriculum works.</a:t>
+              <a:t>Naive domain randomization fails. A curriculum works.</a:t>
             </a:r>
             <a:endParaRPr lang="en-US" sz="3100" dirty="0"/>
           </a:p>
@@ -6358,12 +6336,12 @@
         </p:nvSpPr>
         <p:spPr>
           <a:xfrm>
-            <a:off x="548640" y="1417320"/>
-            <a:ext cx="5349240" cy="3977640"/>
+            <a:off x="548640" y="1481328"/>
+            <a:ext cx="5349240" cy="3913632"/>
           </a:xfrm>
           <a:prstGeom prst="roundRect">
             <a:avLst>
-              <a:gd name="adj" fmla="val 1379"/>
+              <a:gd name="adj" fmla="val 1402"/>
             </a:avLst>
           </a:prstGeom>
           <a:solidFill>
@@ -6385,8 +6363,8 @@
         </p:nvSpPr>
         <p:spPr>
           <a:xfrm>
-            <a:off x="822960" y="1600200"/>
-            <a:ext cx="4800600" cy="310896"/>
+            <a:off x="841248" y="1682496"/>
+            <a:ext cx="4764024" cy="310896"/>
           </a:xfrm>
           <a:prstGeom prst="rect">
             <a:avLst/>
@@ -6424,8 +6402,8 @@
         </p:nvSpPr>
         <p:spPr>
           <a:xfrm>
-            <a:off x="822960" y="2011680"/>
-            <a:ext cx="4800600" cy="3108960"/>
+            <a:off x="841248" y="2103120"/>
+            <a:ext cx="4764024" cy="1005840"/>
           </a:xfrm>
           <a:prstGeom prst="rect">
             <a:avLst/>
@@ -6441,9 +6419,6 @@
               <a:lnSpc>
                 <a:spcPct val="120000"/>
               </a:lnSpc>
-              <a:spcAft>
-                <a:spcPts val="1200"/>
-              </a:spcAft>
               <a:buNone/>
             </a:pPr>
             <a:r>
@@ -6459,15 +6434,37 @@
             </a:r>
             <a:endParaRPr lang="en-US" sz="1250" dirty="0"/>
           </a:p>
+        </p:txBody>
+      </p:sp>
+      <p:sp>
+        <p:nvSpPr>
+          <p:cNvPr id="7" name="Text 5"/>
+          <p:cNvSpPr txBox="1"/>
+          <p:nvPr/>
+        </p:nvSpPr>
+        <p:spPr>
+          <a:xfrm>
+            <a:off x="841248" y="3246120"/>
+            <a:ext cx="4764024" cy="731520"/>
+          </a:xfrm>
+          <a:prstGeom prst="rect">
+            <a:avLst/>
+          </a:prstGeom>
+          <a:noFill/>
+          <a:ln/>
+        </p:spPr>
+        <p:txBody>
+          <a:bodyPr wrap="square" lIns="0" tIns="0" rIns="0" bIns="0" rtlCol="0" anchor="t"/>
+          <a:lstStyle/>
           <a:p>
             <a:pPr indent="0" marL="0">
               <a:lnSpc>
-                <a:spcPct val="120000"/>
+                <a:spcPct val="118000"/>
               </a:lnSpc>
               <a:buNone/>
             </a:pPr>
             <a:r>
-              <a:rPr lang="en-US" sz="1250" b="1" dirty="0">
+              <a:rPr lang="en-US" sz="1400" b="1" dirty="0">
                 <a:solidFill>
                   <a:srgbClr val="F2F8FC"/>
                 </a:solidFill>
@@ -6477,24 +6474,66 @@
               </a:rPr>
               <a:t>Our first attempt returned reward = nan at every evaluation across 85M steps.</a:t>
             </a:r>
-            <a:endParaRPr lang="en-US" sz="1250" dirty="0"/>
-          </a:p>
-        </p:txBody>
-      </p:sp>
-      <p:sp>
-        <p:nvSpPr>
-          <p:cNvPr id="7" name="Shape 5"/>
+            <a:endParaRPr lang="en-US" sz="1400" dirty="0"/>
+          </a:p>
+        </p:txBody>
+      </p:sp>
+      <p:sp>
+        <p:nvSpPr>
+          <p:cNvPr id="8" name="Text 6"/>
+          <p:cNvSpPr txBox="1"/>
+          <p:nvPr/>
+        </p:nvSpPr>
+        <p:spPr>
+          <a:xfrm>
+            <a:off x="841248" y="4315968"/>
+            <a:ext cx="4764024" cy="822960"/>
+          </a:xfrm>
+          <a:prstGeom prst="rect">
+            <a:avLst/>
+          </a:prstGeom>
+          <a:noFill/>
+          <a:ln/>
+        </p:spPr>
+        <p:txBody>
+          <a:bodyPr wrap="square" lIns="0" tIns="0" rIns="0" bIns="0" rtlCol="0" anchor="t"/>
+          <a:lstStyle/>
+          <a:p>
+            <a:pPr indent="0" marL="0">
+              <a:lnSpc>
+                <a:spcPct val="115000"/>
+              </a:lnSpc>
+              <a:buNone/>
+            </a:pPr>
+            <a:r>
+              <a:rPr lang="en-US" sz="1200" i="1" dirty="0">
+                <a:solidFill>
+                  <a:srgbClr val="6E8CA3"/>
+                </a:solidFill>
+                <a:latin typeface="Calibri" pitchFamily="34" charset="0"/>
+                <a:ea typeface="Calibri" pitchFamily="34" charset="-122"/>
+                <a:cs typeface="Calibri" pitchFamily="34" charset="-120"/>
+              </a:rPr>
+              <a:t>Throwing the whole mountain at an untrained policy produces a NaN, not a mountaineer.</a:t>
+            </a:r>
+            <a:endParaRPr lang="en-US" sz="1200" dirty="0"/>
+          </a:p>
+        </p:txBody>
+      </p:sp>
+      <p:sp>
+        <p:nvSpPr>
+          <p:cNvPr id="9" name="Shape 7"/>
           <p:cNvSpPr/>
           <p:nvPr/>
         </p:nvSpPr>
         <p:spPr>
           <a:xfrm>
-            <a:off x="6291072" y="1417320"/>
-            <a:ext cx="5349240" cy="1234440"/>
+            <a:off x="6291072" y="1481328"/>
+            <a:ext cx="5349240" cy="1207008"/>
           </a:xfrm>
           <a:prstGeom prst="roundRect">
             <a:avLst>
-              <a:gd name="adj" fmla="val 4444"/>
+              <a:gd name="adj" fmla="val 4545"/>
             </a:avLst>
           </a:prstGeom>
           <a:solidFill>
@@ -6510,14 +6549,14 @@
       </p:sp>
       <p:sp>
         <p:nvSpPr>
-          <p:cNvPr id="8" name="Shape 6"/>
+          <p:cNvPr id="10" name="Shape 8"/>
           <p:cNvSpPr/>
           <p:nvPr/>
         </p:nvSpPr>
         <p:spPr>
           <a:xfrm>
-            <a:off x="6519672" y="1673352"/>
-            <a:ext cx="475488" cy="475488"/>
+            <a:off x="6537960" y="1746504"/>
+            <a:ext cx="457200" cy="457200"/>
           </a:xfrm>
           <a:prstGeom prst="ellipse">
             <a:avLst/>
@@ -6530,14 +6569,14 @@
       </p:sp>
       <p:sp>
         <p:nvSpPr>
-          <p:cNvPr id="9" name="Text 7"/>
-          <p:cNvSpPr txBox="1"/>
-          <p:nvPr/>
-        </p:nvSpPr>
-        <p:spPr>
-          <a:xfrm>
-            <a:off x="6519672" y="1673352"/>
-            <a:ext cx="475488" cy="475488"/>
+          <p:cNvPr id="11" name="Text 9"/>
+          <p:cNvSpPr txBox="1"/>
+          <p:nvPr/>
+        </p:nvSpPr>
+        <p:spPr>
+          <a:xfrm>
+            <a:off x="6537960" y="1746504"/>
+            <a:ext cx="457200" cy="457200"/>
           </a:xfrm>
           <a:prstGeom prst="rect">
             <a:avLst/>
@@ -6569,14 +6608,14 @@
       </p:sp>
       <p:sp>
         <p:nvSpPr>
-          <p:cNvPr id="10" name="Text 8"/>
-          <p:cNvSpPr txBox="1"/>
-          <p:nvPr/>
-        </p:nvSpPr>
-        <p:spPr>
-          <a:xfrm>
-            <a:off x="7159752" y="1618488"/>
-            <a:ext cx="4297680" cy="310896"/>
+          <p:cNvPr id="12" name="Text 10"/>
+          <p:cNvSpPr txBox="1"/>
+          <p:nvPr/>
+        </p:nvSpPr>
+        <p:spPr>
+          <a:xfrm>
+            <a:off x="7178040" y="1737360"/>
+            <a:ext cx="4251960" cy="292608"/>
           </a:xfrm>
           <a:prstGeom prst="rect">
             <a:avLst/>
@@ -6608,14 +6647,14 @@
       </p:sp>
       <p:sp>
         <p:nvSpPr>
-          <p:cNvPr id="11" name="Text 9"/>
-          <p:cNvSpPr txBox="1"/>
-          <p:nvPr/>
-        </p:nvSpPr>
-        <p:spPr>
-          <a:xfrm>
-            <a:off x="7159752" y="1947672"/>
-            <a:ext cx="4297680" cy="548640"/>
+          <p:cNvPr id="13" name="Text 11"/>
+          <p:cNvSpPr txBox="1"/>
+          <p:nvPr/>
+        </p:nvSpPr>
+        <p:spPr>
+          <a:xfrm>
+            <a:off x="7178040" y="2057400"/>
+            <a:ext cx="4251960" cy="502920"/>
           </a:xfrm>
           <a:prstGeom prst="rect">
             <a:avLst/>
@@ -6642,7 +6681,7 @@
                 <a:ea typeface="Calibri" pitchFamily="34" charset="-122"/>
                 <a:cs typeface="Calibri" pitchFamily="34" charset="-120"/>
               </a:rPr>
-              <a:t>A stable policy first, on friction the physics is well behaved on.</a:t>
+              <a:t>A stable policy first, before any ice is introduced.</a:t>
             </a:r>
             <a:endParaRPr lang="en-US" sz="1100" dirty="0"/>
           </a:p>
@@ -6650,18 +6689,18 @@
       </p:sp>
       <p:sp>
         <p:nvSpPr>
-          <p:cNvPr id="12" name="Shape 10"/>
+          <p:cNvPr id="14" name="Shape 12"/>
           <p:cNvSpPr/>
           <p:nvPr/>
         </p:nvSpPr>
         <p:spPr>
           <a:xfrm>
-            <a:off x="6291072" y="2788920"/>
-            <a:ext cx="5349240" cy="1234440"/>
+            <a:off x="6291072" y="2834640"/>
+            <a:ext cx="5349240" cy="1207008"/>
           </a:xfrm>
           <a:prstGeom prst="roundRect">
             <a:avLst>
-              <a:gd name="adj" fmla="val 4444"/>
+              <a:gd name="adj" fmla="val 4545"/>
             </a:avLst>
           </a:prstGeom>
           <a:solidFill>
@@ -6677,14 +6716,14 @@
       </p:sp>
       <p:sp>
         <p:nvSpPr>
-          <p:cNvPr id="13" name="Shape 11"/>
+          <p:cNvPr id="15" name="Shape 13"/>
           <p:cNvSpPr/>
           <p:nvPr/>
         </p:nvSpPr>
         <p:spPr>
           <a:xfrm>
-            <a:off x="6519672" y="3044952"/>
-            <a:ext cx="475488" cy="475488"/>
+            <a:off x="6537960" y="3099816"/>
+            <a:ext cx="457200" cy="457200"/>
           </a:xfrm>
           <a:prstGeom prst="ellipse">
             <a:avLst/>
@@ -6697,14 +6736,14 @@
       </p:sp>
       <p:sp>
         <p:nvSpPr>
-          <p:cNvPr id="14" name="Text 12"/>
-          <p:cNvSpPr txBox="1"/>
-          <p:nvPr/>
-        </p:nvSpPr>
-        <p:spPr>
-          <a:xfrm>
-            <a:off x="6519672" y="3044952"/>
-            <a:ext cx="475488" cy="475488"/>
+          <p:cNvPr id="16" name="Text 14"/>
+          <p:cNvSpPr txBox="1"/>
+          <p:nvPr/>
+        </p:nvSpPr>
+        <p:spPr>
+          <a:xfrm>
+            <a:off x="6537960" y="3099816"/>
+            <a:ext cx="457200" cy="457200"/>
           </a:xfrm>
           <a:prstGeom prst="rect">
             <a:avLst/>
@@ -6736,14 +6775,14 @@
       </p:sp>
       <p:sp>
         <p:nvSpPr>
-          <p:cNvPr id="15" name="Text 13"/>
-          <p:cNvSpPr txBox="1"/>
-          <p:nvPr/>
-        </p:nvSpPr>
-        <p:spPr>
-          <a:xfrm>
-            <a:off x="7159752" y="2990088"/>
-            <a:ext cx="4297680" cy="310896"/>
+          <p:cNvPr id="17" name="Text 15"/>
+          <p:cNvSpPr txBox="1"/>
+          <p:nvPr/>
+        </p:nvSpPr>
+        <p:spPr>
+          <a:xfrm>
+            <a:off x="7178040" y="3090672"/>
+            <a:ext cx="4251960" cy="292608"/>
           </a:xfrm>
           <a:prstGeom prst="rect">
             <a:avLst/>
@@ -6775,14 +6814,14 @@
       </p:sp>
       <p:sp>
         <p:nvSpPr>
-          <p:cNvPr id="16" name="Text 14"/>
-          <p:cNvSpPr txBox="1"/>
-          <p:nvPr/>
-        </p:nvSpPr>
-        <p:spPr>
-          <a:xfrm>
-            <a:off x="7159752" y="3319272"/>
-            <a:ext cx="4297680" cy="548640"/>
+          <p:cNvPr id="18" name="Text 16"/>
+          <p:cNvSpPr txBox="1"/>
+          <p:nvPr/>
+        </p:nvSpPr>
+        <p:spPr>
+          <a:xfrm>
+            <a:off x="7178040" y="3410712"/>
+            <a:ext cx="4251960" cy="502920"/>
           </a:xfrm>
           <a:prstGeom prst="rect">
             <a:avLst/>
@@ -6817,18 +6856,18 @@
       </p:sp>
       <p:sp>
         <p:nvSpPr>
-          <p:cNvPr id="17" name="Shape 15"/>
+          <p:cNvPr id="19" name="Shape 17"/>
           <p:cNvSpPr/>
           <p:nvPr/>
         </p:nvSpPr>
         <p:spPr>
           <a:xfrm>
-            <a:off x="6291072" y="4160520"/>
-            <a:ext cx="5349240" cy="1234440"/>
+            <a:off x="6291072" y="4187952"/>
+            <a:ext cx="5349240" cy="1207008"/>
           </a:xfrm>
           <a:prstGeom prst="roundRect">
             <a:avLst>
-              <a:gd name="adj" fmla="val 4444"/>
+              <a:gd name="adj" fmla="val 4545"/>
             </a:avLst>
           </a:prstGeom>
           <a:solidFill>
@@ -6844,14 +6883,14 @@
       </p:sp>
       <p:sp>
         <p:nvSpPr>
-          <p:cNvPr id="18" name="Shape 16"/>
+          <p:cNvPr id="20" name="Shape 18"/>
           <p:cNvSpPr/>
           <p:nvPr/>
         </p:nvSpPr>
         <p:spPr>
           <a:xfrm>
-            <a:off x="6519672" y="4416552"/>
-            <a:ext cx="475488" cy="475488"/>
+            <a:off x="6537960" y="4453128"/>
+            <a:ext cx="457200" cy="457200"/>
           </a:xfrm>
           <a:prstGeom prst="ellipse">
             <a:avLst/>
@@ -6864,14 +6903,14 @@
       </p:sp>
       <p:sp>
         <p:nvSpPr>
-          <p:cNvPr id="19" name="Text 17"/>
-          <p:cNvSpPr txBox="1"/>
-          <p:nvPr/>
-        </p:nvSpPr>
-        <p:spPr>
-          <a:xfrm>
-            <a:off x="6519672" y="4416552"/>
-            <a:ext cx="475488" cy="475488"/>
+          <p:cNvPr id="21" name="Text 19"/>
+          <p:cNvSpPr txBox="1"/>
+          <p:nvPr/>
+        </p:nvSpPr>
+        <p:spPr>
+          <a:xfrm>
+            <a:off x="6537960" y="4453128"/>
+            <a:ext cx="457200" cy="457200"/>
           </a:xfrm>
           <a:prstGeom prst="rect">
             <a:avLst/>
@@ -6903,14 +6942,14 @@
       </p:sp>
       <p:sp>
         <p:nvSpPr>
-          <p:cNvPr id="20" name="Text 18"/>
-          <p:cNvSpPr txBox="1"/>
-          <p:nvPr/>
-        </p:nvSpPr>
-        <p:spPr>
-          <a:xfrm>
-            <a:off x="7159752" y="4361688"/>
-            <a:ext cx="4297680" cy="310896"/>
+          <p:cNvPr id="22" name="Text 20"/>
+          <p:cNvSpPr txBox="1"/>
+          <p:nvPr/>
+        </p:nvSpPr>
+        <p:spPr>
+          <a:xfrm>
+            <a:off x="7178040" y="4443984"/>
+            <a:ext cx="4251960" cy="292608"/>
           </a:xfrm>
           <a:prstGeom prst="rect">
             <a:avLst/>
@@ -6942,14 +6981,14 @@
       </p:sp>
       <p:sp>
         <p:nvSpPr>
-          <p:cNvPr id="21" name="Text 19"/>
-          <p:cNvSpPr txBox="1"/>
-          <p:nvPr/>
-        </p:nvSpPr>
-        <p:spPr>
-          <a:xfrm>
-            <a:off x="7159752" y="4690872"/>
-            <a:ext cx="4297680" cy="548640"/>
+          <p:cNvPr id="23" name="Text 21"/>
+          <p:cNvSpPr txBox="1"/>
+          <p:nvPr/>
+        </p:nvSpPr>
+        <p:spPr>
+          <a:xfrm>
+            <a:off x="7178040" y="4764024"/>
+            <a:ext cx="4251960" cy="502920"/>
           </a:xfrm>
           <a:prstGeom prst="rect">
             <a:avLst/>
@@ -6984,49 +7023,7 @@
       </p:sp>
       <p:sp>
         <p:nvSpPr>
-          <p:cNvPr id="22" name="Text 20"/>
-          <p:cNvSpPr txBox="1"/>
-          <p:nvPr/>
-        </p:nvSpPr>
-        <p:spPr>
-          <a:xfrm>
-            <a:off x="548640" y="5596128"/>
-            <a:ext cx="5349240" cy="658368"/>
-          </a:xfrm>
-          <a:prstGeom prst="rect">
-            <a:avLst/>
-          </a:prstGeom>
-          <a:noFill/>
-          <a:ln/>
-        </p:spPr>
-        <p:txBody>
-          <a:bodyPr wrap="square" lIns="0" tIns="0" rIns="0" bIns="0" rtlCol="0" anchor="t"/>
-          <a:lstStyle/>
-          <a:p>
-            <a:pPr indent="0" marL="0">
-              <a:lnSpc>
-                <a:spcPct val="115000"/>
-              </a:lnSpc>
-              <a:buNone/>
-            </a:pPr>
-            <a:r>
-              <a:rPr lang="en-US" sz="1200" i="1" dirty="0">
-                <a:solidFill>
-                  <a:srgbClr val="6E8CA3"/>
-                </a:solidFill>
-                <a:latin typeface="Calibri" pitchFamily="34" charset="0"/>
-                <a:ea typeface="Calibri" pitchFamily="34" charset="-122"/>
-                <a:cs typeface="Calibri" pitchFamily="34" charset="-120"/>
-              </a:rPr>
-              <a:t>Throwing the whole mountain at an untrained policy produces a NaN, not a mountaineer.</a:t>
-            </a:r>
-            <a:endParaRPr lang="en-US" sz="1200" dirty="0"/>
-          </a:p>
-        </p:txBody>
-      </p:sp>
-      <p:sp>
-        <p:nvSpPr>
-          <p:cNvPr id="23" name="Text 21"/>
+          <p:cNvPr id="24" name="Text 22"/>
           <p:cNvSpPr txBox="1"/>
           <p:nvPr/>
         </p:nvSpPr>
@@ -7065,7 +7062,7 @@
       </p:sp>
       <p:sp>
         <p:nvSpPr>
-          <p:cNvPr id="24" name="Text 22"/>
+          <p:cNvPr id="25" name="Text 23"/>
           <p:cNvSpPr txBox="1"/>
           <p:nvPr/>
         </p:nvSpPr>
@@ -7298,12 +7295,12 @@
         </p:nvSpPr>
         <p:spPr>
           <a:xfrm>
-            <a:off x="548640" y="2148840"/>
-            <a:ext cx="5349240" cy="1298448"/>
+            <a:off x="548640" y="2176272"/>
+            <a:ext cx="5349240" cy="1225296"/>
           </a:xfrm>
           <a:prstGeom prst="roundRect">
             <a:avLst>
-              <a:gd name="adj" fmla="val 4225"/>
+              <a:gd name="adj" fmla="val 4478"/>
             </a:avLst>
           </a:prstGeom>
           <a:solidFill>
@@ -7325,7 +7322,7 @@
         </p:nvSpPr>
         <p:spPr>
           <a:xfrm>
-            <a:off x="804672" y="2423160"/>
+            <a:off x="804672" y="2450592"/>
             <a:ext cx="1691640" cy="548640"/>
           </a:xfrm>
           <a:prstGeom prst="rect">
@@ -7364,8 +7361,8 @@
         </p:nvSpPr>
         <p:spPr>
           <a:xfrm>
-            <a:off x="2560320" y="2377440"/>
-            <a:ext cx="3108960" cy="310896"/>
+            <a:off x="2560320" y="2423160"/>
+            <a:ext cx="3108960" cy="292608"/>
           </a:xfrm>
           <a:prstGeom prst="rect">
             <a:avLst/>
@@ -7403,8 +7400,8 @@
         </p:nvSpPr>
         <p:spPr>
           <a:xfrm>
-            <a:off x="2560320" y="2697480"/>
-            <a:ext cx="3108960" cy="566928"/>
+            <a:off x="2560320" y="2734056"/>
+            <a:ext cx="3108960" cy="512064"/>
           </a:xfrm>
           <a:prstGeom prst="rect">
             <a:avLst/>
@@ -7445,12 +7442,12 @@
         </p:nvSpPr>
         <p:spPr>
           <a:xfrm>
-            <a:off x="548640" y="3593592"/>
-            <a:ext cx="5349240" cy="1298448"/>
+            <a:off x="548640" y="3566160"/>
+            <a:ext cx="5349240" cy="1225296"/>
           </a:xfrm>
           <a:prstGeom prst="roundRect">
             <a:avLst>
-              <a:gd name="adj" fmla="val 4225"/>
+              <a:gd name="adj" fmla="val 4478"/>
             </a:avLst>
           </a:prstGeom>
           <a:solidFill>
@@ -7472,7 +7469,7 @@
         </p:nvSpPr>
         <p:spPr>
           <a:xfrm>
-            <a:off x="804672" y="3867912"/>
+            <a:off x="804672" y="3840480"/>
             <a:ext cx="1691640" cy="548640"/>
           </a:xfrm>
           <a:prstGeom prst="rect">
@@ -7511,8 +7508,8 @@
         </p:nvSpPr>
         <p:spPr>
           <a:xfrm>
-            <a:off x="2560320" y="3822192"/>
-            <a:ext cx="3108960" cy="310896"/>
+            <a:off x="2560320" y="3813048"/>
+            <a:ext cx="3108960" cy="292608"/>
           </a:xfrm>
           <a:prstGeom prst="rect">
             <a:avLst/>
@@ -7550,8 +7547,8 @@
         </p:nvSpPr>
         <p:spPr>
           <a:xfrm>
-            <a:off x="2560320" y="4142232"/>
-            <a:ext cx="3108960" cy="566928"/>
+            <a:off x="2560320" y="4123944"/>
+            <a:ext cx="3108960" cy="512064"/>
           </a:xfrm>
           <a:prstGeom prst="rect">
             <a:avLst/>
@@ -7631,12 +7628,12 @@
         </p:nvSpPr>
         <p:spPr>
           <a:xfrm>
-            <a:off x="6291072" y="2148840"/>
-            <a:ext cx="5349240" cy="1298448"/>
+            <a:off x="6291072" y="2176272"/>
+            <a:ext cx="5349240" cy="1225296"/>
           </a:xfrm>
           <a:prstGeom prst="roundRect">
             <a:avLst>
-              <a:gd name="adj" fmla="val 4225"/>
+              <a:gd name="adj" fmla="val 4478"/>
             </a:avLst>
           </a:prstGeom>
           <a:solidFill>
@@ -7658,7 +7655,7 @@
         </p:nvSpPr>
         <p:spPr>
           <a:xfrm>
-            <a:off x="6547104" y="2423160"/>
+            <a:off x="6547104" y="2450592"/>
             <a:ext cx="1691640" cy="548640"/>
           </a:xfrm>
           <a:prstGeom prst="rect">
@@ -7697,8 +7694,8 @@
         </p:nvSpPr>
         <p:spPr>
           <a:xfrm>
-            <a:off x="8302752" y="2377440"/>
-            <a:ext cx="3108960" cy="310896"/>
+            <a:off x="8302752" y="2423160"/>
+            <a:ext cx="3108960" cy="292608"/>
           </a:xfrm>
           <a:prstGeom prst="rect">
             <a:avLst/>
@@ -7736,8 +7733,8 @@
         </p:nvSpPr>
         <p:spPr>
           <a:xfrm>
-            <a:off x="8302752" y="2697480"/>
-            <a:ext cx="3108960" cy="566928"/>
+            <a:off x="8302752" y="2734056"/>
+            <a:ext cx="3108960" cy="512064"/>
           </a:xfrm>
           <a:prstGeom prst="rect">
             <a:avLst/>
@@ -7778,12 +7775,12 @@
         </p:nvSpPr>
         <p:spPr>
           <a:xfrm>
-            <a:off x="6291072" y="3593592"/>
-            <a:ext cx="5349240" cy="1298448"/>
+            <a:off x="6291072" y="3566160"/>
+            <a:ext cx="5349240" cy="1225296"/>
           </a:xfrm>
           <a:prstGeom prst="roundRect">
             <a:avLst>
-              <a:gd name="adj" fmla="val 4225"/>
+              <a:gd name="adj" fmla="val 4478"/>
             </a:avLst>
           </a:prstGeom>
           <a:solidFill>
@@ -7805,7 +7802,7 @@
         </p:nvSpPr>
         <p:spPr>
           <a:xfrm>
-            <a:off x="6547104" y="3867912"/>
+            <a:off x="6547104" y="3840480"/>
             <a:ext cx="1691640" cy="548640"/>
           </a:xfrm>
           <a:prstGeom prst="rect">
@@ -7844,8 +7841,8 @@
         </p:nvSpPr>
         <p:spPr>
           <a:xfrm>
-            <a:off x="8302752" y="3822192"/>
-            <a:ext cx="3108960" cy="310896"/>
+            <a:off x="8302752" y="3813048"/>
+            <a:ext cx="3108960" cy="292608"/>
           </a:xfrm>
           <a:prstGeom prst="rect">
             <a:avLst/>
@@ -7883,8 +7880,8 @@
         </p:nvSpPr>
         <p:spPr>
           <a:xfrm>
-            <a:off x="8302752" y="4142232"/>
-            <a:ext cx="3108960" cy="566928"/>
+            <a:off x="8302752" y="4123944"/>
+            <a:ext cx="3108960" cy="512064"/>
           </a:xfrm>
           <a:prstGeom prst="rect">
             <a:avLst/>
@@ -7925,12 +7922,12 @@
         </p:nvSpPr>
         <p:spPr>
           <a:xfrm>
-            <a:off x="548640" y="5138928"/>
-            <a:ext cx="11094415" cy="1078992"/>
+            <a:off x="548640" y="5047488"/>
+            <a:ext cx="11094415" cy="1170432"/>
           </a:xfrm>
           <a:prstGeom prst="roundRect">
             <a:avLst>
-              <a:gd name="adj" fmla="val 5085"/>
+              <a:gd name="adj" fmla="val 4688"/>
             </a:avLst>
           </a:prstGeom>
           <a:solidFill>
@@ -7952,8 +7949,8 @@
         </p:nvSpPr>
         <p:spPr>
           <a:xfrm>
-            <a:off x="822960" y="5303520"/>
-            <a:ext cx="10545775" cy="749808"/>
+            <a:off x="841248" y="5193792"/>
+            <a:ext cx="10509199" cy="877824"/>
           </a:xfrm>
           <a:prstGeom prst="rect">
             <a:avLst/>
@@ -8185,7 +8182,7 @@
                 <a:ea typeface="Cambria" pitchFamily="34" charset="-122"/>
                 <a:cs typeface="Cambria" pitchFamily="34" charset="-120"/>
               </a:rPr>
-              <a:t>The Everest Base Camp approach, built from how the route actually is</a:t>
+              <a:t>The Everest Base Camp approach, built from the real route</a:t>
             </a:r>
             <a:endParaRPr lang="en-US" sz="3100" dirty="0"/>
           </a:p>
@@ -8968,12 +8965,12 @@
         </p:nvSpPr>
         <p:spPr>
           <a:xfrm>
-            <a:off x="548640" y="1417320"/>
-            <a:ext cx="3566160" cy="1371600"/>
+            <a:off x="548640" y="1463040"/>
+            <a:ext cx="3566160" cy="1280160"/>
           </a:xfrm>
           <a:prstGeom prst="roundRect">
             <a:avLst>
-              <a:gd name="adj" fmla="val 4000"/>
+              <a:gd name="adj" fmla="val 4286"/>
             </a:avLst>
           </a:prstGeom>
           <a:solidFill>
@@ -8995,8 +8992,8 @@
         </p:nvSpPr>
         <p:spPr>
           <a:xfrm>
-            <a:off x="822960" y="1572768"/>
-            <a:ext cx="3017520" cy="566928"/>
+            <a:off x="822960" y="1609344"/>
+            <a:ext cx="3017520" cy="548640"/>
           </a:xfrm>
           <a:prstGeom prst="rect">
             <a:avLst/>
@@ -9034,8 +9031,8 @@
         </p:nvSpPr>
         <p:spPr>
           <a:xfrm>
-            <a:off x="822960" y="2176272"/>
-            <a:ext cx="3017520" cy="310896"/>
+            <a:off x="822960" y="2194560"/>
+            <a:ext cx="3017520" cy="292608"/>
           </a:xfrm>
           <a:prstGeom prst="rect">
             <a:avLst/>
@@ -9073,12 +9070,12 @@
         </p:nvSpPr>
         <p:spPr>
           <a:xfrm>
-            <a:off x="4315968" y="1417320"/>
-            <a:ext cx="3566160" cy="1371600"/>
+            <a:off x="4315968" y="1463040"/>
+            <a:ext cx="3566160" cy="1280160"/>
           </a:xfrm>
           <a:prstGeom prst="roundRect">
             <a:avLst>
-              <a:gd name="adj" fmla="val 4000"/>
+              <a:gd name="adj" fmla="val 4286"/>
             </a:avLst>
           </a:prstGeom>
           <a:solidFill>
@@ -9100,8 +9097,8 @@
         </p:nvSpPr>
         <p:spPr>
           <a:xfrm>
-            <a:off x="4590288" y="1572768"/>
-            <a:ext cx="3017520" cy="566928"/>
+            <a:off x="4590288" y="1609344"/>
+            <a:ext cx="3017520" cy="548640"/>
           </a:xfrm>
           <a:prstGeom prst="rect">
             <a:avLst/>
@@ -9139,8 +9136,8 @@
         </p:nvSpPr>
         <p:spPr>
           <a:xfrm>
-            <a:off x="4590288" y="2176272"/>
-            <a:ext cx="3017520" cy="310896"/>
+            <a:off x="4590288" y="2194560"/>
+            <a:ext cx="3017520" cy="292608"/>
           </a:xfrm>
           <a:prstGeom prst="rect">
             <a:avLst/>
@@ -9178,12 +9175,12 @@
         </p:nvSpPr>
         <p:spPr>
           <a:xfrm>
-            <a:off x="8083296" y="1417320"/>
-            <a:ext cx="3566160" cy="1371600"/>
+            <a:off x="8083296" y="1463040"/>
+            <a:ext cx="3566160" cy="1280160"/>
           </a:xfrm>
           <a:prstGeom prst="roundRect">
             <a:avLst>
-              <a:gd name="adj" fmla="val 4000"/>
+              <a:gd name="adj" fmla="val 4286"/>
             </a:avLst>
           </a:prstGeom>
           <a:solidFill>
@@ -9205,8 +9202,8 @@
         </p:nvSpPr>
         <p:spPr>
           <a:xfrm>
-            <a:off x="8357616" y="1572768"/>
-            <a:ext cx="3017520" cy="566928"/>
+            <a:off x="8357616" y="1609344"/>
+            <a:ext cx="3017520" cy="548640"/>
           </a:xfrm>
           <a:prstGeom prst="rect">
             <a:avLst/>
@@ -9244,8 +9241,8 @@
         </p:nvSpPr>
         <p:spPr>
           <a:xfrm>
-            <a:off x="8357616" y="2176272"/>
-            <a:ext cx="3017520" cy="310896"/>
+            <a:off x="8357616" y="2194560"/>
+            <a:ext cx="3017520" cy="292608"/>
           </a:xfrm>
           <a:prstGeom prst="rect">
             <a:avLst/>
@@ -9283,12 +9280,12 @@
         </p:nvSpPr>
         <p:spPr>
           <a:xfrm>
-            <a:off x="548640" y="3035808"/>
-            <a:ext cx="11094415" cy="1572768"/>
+            <a:off x="548640" y="2962656"/>
+            <a:ext cx="11094415" cy="1481328"/>
           </a:xfrm>
           <a:prstGeom prst="roundRect">
             <a:avLst>
-              <a:gd name="adj" fmla="val 3488"/>
+              <a:gd name="adj" fmla="val 3704"/>
             </a:avLst>
           </a:prstGeom>
           <a:solidFill>
@@ -9310,7 +9307,7 @@
         </p:nvSpPr>
         <p:spPr>
           <a:xfrm>
-            <a:off x="822960" y="3163824"/>
+            <a:off x="841248" y="3090672"/>
             <a:ext cx="5486400" cy="274320"/>
           </a:xfrm>
           <a:prstGeom prst="rect">
@@ -9349,8 +9346,8 @@
         </p:nvSpPr>
         <p:spPr>
           <a:xfrm>
-            <a:off x="822960" y="3520440"/>
-            <a:ext cx="1645920" cy="310896"/>
+            <a:off x="841248" y="3447288"/>
+            <a:ext cx="1554480" cy="310896"/>
           </a:xfrm>
           <a:prstGeom prst="rect">
             <a:avLst/>
@@ -9388,8 +9385,8 @@
         </p:nvSpPr>
         <p:spPr>
           <a:xfrm>
-            <a:off x="2560320" y="3566160"/>
-            <a:ext cx="882990" cy="237744"/>
+            <a:off x="2468880" y="3493008"/>
+            <a:ext cx="763935" cy="237744"/>
           </a:xfrm>
           <a:prstGeom prst="roundRect">
             <a:avLst>
@@ -9410,8 +9407,8 @@
         </p:nvSpPr>
         <p:spPr>
           <a:xfrm>
-            <a:off x="3571326" y="3520440"/>
-            <a:ext cx="1280160" cy="310896"/>
+            <a:off x="3379119" y="3447288"/>
+            <a:ext cx="1371600" cy="310896"/>
           </a:xfrm>
           <a:prstGeom prst="rect">
             <a:avLst/>
@@ -9449,8 +9446,8 @@
         </p:nvSpPr>
         <p:spPr>
           <a:xfrm>
-            <a:off x="822960" y="3977640"/>
-            <a:ext cx="1645920" cy="310896"/>
+            <a:off x="841248" y="3904488"/>
+            <a:ext cx="1554480" cy="310896"/>
           </a:xfrm>
           <a:prstGeom prst="rect">
             <a:avLst/>
@@ -9488,8 +9485,8 @@
         </p:nvSpPr>
         <p:spPr>
           <a:xfrm>
-            <a:off x="2560320" y="4023360"/>
-            <a:ext cx="8138160" cy="237744"/>
+            <a:off x="2468880" y="3950208"/>
+            <a:ext cx="7040880" cy="237744"/>
           </a:xfrm>
           <a:prstGeom prst="roundRect">
             <a:avLst>
@@ -9510,8 +9507,8 @@
         </p:nvSpPr>
         <p:spPr>
           <a:xfrm>
-            <a:off x="10826496" y="3977640"/>
-            <a:ext cx="1280160" cy="310896"/>
+            <a:off x="9656064" y="3904488"/>
+            <a:ext cx="1371600" cy="310896"/>
           </a:xfrm>
           <a:prstGeom prst="rect">
             <a:avLst/>
@@ -9535,7 +9532,7 @@
                 <a:ea typeface="Calibri" pitchFamily="34" charset="-122"/>
                 <a:cs typeface="Calibri" pitchFamily="34" charset="-120"/>
               </a:rPr>
-              <a:t>20.00 ms</a:t>
+              <a:t>20 ms</a:t>
             </a:r>
             <a:endParaRPr lang="en-US" sz="1100" dirty="0"/>
           </a:p>
@@ -9549,12 +9546,12 @@
         </p:nvSpPr>
         <p:spPr>
           <a:xfrm>
-            <a:off x="548640" y="4864608"/>
-            <a:ext cx="5468112" cy="1371600"/>
+            <a:off x="548640" y="4700016"/>
+            <a:ext cx="5468112" cy="1481328"/>
           </a:xfrm>
           <a:prstGeom prst="roundRect">
             <a:avLst>
-              <a:gd name="adj" fmla="val 4000"/>
+              <a:gd name="adj" fmla="val 3704"/>
             </a:avLst>
           </a:prstGeom>
           <a:solidFill>
@@ -9576,8 +9573,8 @@
         </p:nvSpPr>
         <p:spPr>
           <a:xfrm>
-            <a:off x="804672" y="4992624"/>
-            <a:ext cx="4956048" cy="292608"/>
+            <a:off x="822960" y="4846320"/>
+            <a:ext cx="4919472" cy="292608"/>
           </a:xfrm>
           <a:prstGeom prst="rect">
             <a:avLst/>
@@ -9615,8 +9612,8 @@
         </p:nvSpPr>
         <p:spPr>
           <a:xfrm>
-            <a:off x="804672" y="5303520"/>
-            <a:ext cx="4956048" cy="822960"/>
+            <a:off x="822960" y="5175504"/>
+            <a:ext cx="4919472" cy="859536"/>
           </a:xfrm>
           <a:prstGeom prst="rect">
             <a:avLst/>
@@ -9630,12 +9627,12 @@
           <a:p>
             <a:pPr indent="0" marL="0">
               <a:lnSpc>
-                <a:spcPct val="112000"/>
+                <a:spcPct val="114000"/>
               </a:lnSpc>
               <a:buNone/>
             </a:pPr>
             <a:r>
-              <a:rPr lang="en-US" sz="1100" dirty="0">
+              <a:rPr lang="en-US" sz="1150" dirty="0">
                 <a:solidFill>
                   <a:srgbClr val="A9C8DF"/>
                 </a:solidFill>
@@ -9645,7 +9642,7 @@
               </a:rPr>
               <a:t>MJX trains thousands of robots at once on a GPU. Deployment is a single robot on native MuJoCo, which is the shape of what a Jetson Thor would run.</a:t>
             </a:r>
-            <a:endParaRPr lang="en-US" sz="1100" dirty="0"/>
+            <a:endParaRPr lang="en-US" sz="1150" dirty="0"/>
           </a:p>
         </p:txBody>
       </p:sp>
@@ -9657,12 +9654,12 @@
         </p:nvSpPr>
         <p:spPr>
           <a:xfrm>
-            <a:off x="6172200" y="4864608"/>
-            <a:ext cx="5468112" cy="1371600"/>
+            <a:off x="6172200" y="4700016"/>
+            <a:ext cx="5468112" cy="1481328"/>
           </a:xfrm>
           <a:prstGeom prst="roundRect">
             <a:avLst>
-              <a:gd name="adj" fmla="val 4000"/>
+              <a:gd name="adj" fmla="val 3704"/>
             </a:avLst>
           </a:prstGeom>
           <a:solidFill>
@@ -9684,8 +9681,8 @@
         </p:nvSpPr>
         <p:spPr>
           <a:xfrm>
-            <a:off x="6428232" y="4992624"/>
-            <a:ext cx="4956048" cy="292608"/>
+            <a:off x="6446520" y="4846320"/>
+            <a:ext cx="4919472" cy="292608"/>
           </a:xfrm>
           <a:prstGeom prst="rect">
             <a:avLst/>
@@ -9723,8 +9720,8 @@
         </p:nvSpPr>
         <p:spPr>
           <a:xfrm>
-            <a:off x="6428232" y="5303520"/>
-            <a:ext cx="4956048" cy="822960"/>
+            <a:off x="6446520" y="5175504"/>
+            <a:ext cx="4919472" cy="859536"/>
           </a:xfrm>
           <a:prstGeom prst="rect">
             <a:avLst/>
@@ -9738,12 +9735,12 @@
           <a:p>
             <a:pPr indent="0" marL="0">
               <a:lnSpc>
-                <a:spcPct val="112000"/>
+                <a:spcPct val="114000"/>
               </a:lnSpc>
               <a:buNone/>
             </a:pPr>
             <a:r>
-              <a:rPr lang="en-US" sz="1100" dirty="0">
+              <a:rPr lang="en-US" sz="1150" dirty="0">
                 <a:solidFill>
                   <a:srgbClr val="A9C8DF"/>
                 </a:solidFill>
@@ -9753,7 +9750,7 @@
               </a:rPr>
               <a:t>The same policy and the same loop drive the live demo and would drive the robot. Nothing is re-implemented between them.</a:t>
             </a:r>
-            <a:endParaRPr lang="en-US" sz="1100" dirty="0"/>
+            <a:endParaRPr lang="en-US" sz="1150" dirty="0"/>
           </a:p>
         </p:txBody>
       </p:sp>
@@ -9978,7 +9975,7 @@
                 <a:ea typeface="Calibri" pitchFamily="34" charset="-122"/>
                 <a:cs typeface="Calibri" pitchFamily="34" charset="-120"/>
               </a:rPr>
-              <a:t>Seven training runs. Each failed for a genuinely different, diagnosed reason.</a:t>
+              <a:t>Seven training runs. Each failed for a genuinely different, diagnosed reason. v6 got the furthest.</a:t>
             </a:r>
             <a:endParaRPr lang="en-US" sz="1300" dirty="0"/>
           </a:p>
@@ -9992,7 +9989,7 @@
         </p:nvSpPr>
         <p:spPr>
           <a:xfrm>
-            <a:off x="548640" y="1709928"/>
+            <a:off x="548640" y="1764792"/>
             <a:ext cx="256032" cy="256032"/>
           </a:xfrm>
           <a:prstGeom prst="ellipse">
@@ -10012,7 +10009,7 @@
         </p:nvSpPr>
         <p:spPr>
           <a:xfrm>
-            <a:off x="548640" y="1709928"/>
+            <a:off x="548640" y="1764792"/>
             <a:ext cx="256032" cy="256032"/>
           </a:xfrm>
           <a:prstGeom prst="rect">
@@ -10051,7 +10048,7 @@
         </p:nvSpPr>
         <p:spPr>
           <a:xfrm>
-            <a:off x="932688" y="1664208"/>
+            <a:off x="932688" y="1719072"/>
             <a:ext cx="6172200" cy="384048"/>
           </a:xfrm>
           <a:prstGeom prst="rect">
@@ -10110,7 +10107,7 @@
         </p:nvSpPr>
         <p:spPr>
           <a:xfrm>
-            <a:off x="548640" y="2148840"/>
+            <a:off x="548640" y="2203704"/>
             <a:ext cx="256032" cy="256032"/>
           </a:xfrm>
           <a:prstGeom prst="ellipse">
@@ -10130,7 +10127,7 @@
         </p:nvSpPr>
         <p:spPr>
           <a:xfrm>
-            <a:off x="548640" y="2148840"/>
+            <a:off x="548640" y="2203704"/>
             <a:ext cx="256032" cy="256032"/>
           </a:xfrm>
           <a:prstGeom prst="rect">
@@ -10169,7 +10166,7 @@
         </p:nvSpPr>
         <p:spPr>
           <a:xfrm>
-            <a:off x="932688" y="2103120"/>
+            <a:off x="932688" y="2157984"/>
             <a:ext cx="6172200" cy="384048"/>
           </a:xfrm>
           <a:prstGeom prst="rect">
@@ -10228,7 +10225,7 @@
         </p:nvSpPr>
         <p:spPr>
           <a:xfrm>
-            <a:off x="548640" y="2587752"/>
+            <a:off x="548640" y="2642616"/>
             <a:ext cx="256032" cy="256032"/>
           </a:xfrm>
           <a:prstGeom prst="ellipse">
@@ -10248,7 +10245,7 @@
         </p:nvSpPr>
         <p:spPr>
           <a:xfrm>
-            <a:off x="548640" y="2587752"/>
+            <a:off x="548640" y="2642616"/>
             <a:ext cx="256032" cy="256032"/>
           </a:xfrm>
           <a:prstGeom prst="rect">
@@ -10287,7 +10284,7 @@
         </p:nvSpPr>
         <p:spPr>
           <a:xfrm>
-            <a:off x="932688" y="2542032"/>
+            <a:off x="932688" y="2596896"/>
             <a:ext cx="6172200" cy="384048"/>
           </a:xfrm>
           <a:prstGeom prst="rect">
@@ -10346,7 +10343,7 @@
         </p:nvSpPr>
         <p:spPr>
           <a:xfrm>
-            <a:off x="548640" y="3026664"/>
+            <a:off x="548640" y="3081528"/>
             <a:ext cx="256032" cy="256032"/>
           </a:xfrm>
           <a:prstGeom prst="ellipse">
@@ -10366,7 +10363,7 @@
         </p:nvSpPr>
         <p:spPr>
           <a:xfrm>
-            <a:off x="548640" y="3026664"/>
+            <a:off x="548640" y="3081528"/>
             <a:ext cx="256032" cy="256032"/>
           </a:xfrm>
           <a:prstGeom prst="rect">
@@ -10405,8 +10402,8 @@
         </p:nvSpPr>
         <p:spPr>
           <a:xfrm>
-            <a:off x="932688" y="2980944"/>
-            <a:ext cx="6172200" cy="914400"/>
+            <a:off x="932688" y="3035808"/>
+            <a:ext cx="6172200" cy="777240"/>
           </a:xfrm>
           <a:prstGeom prst="rect">
             <a:avLst/>
@@ -10464,7 +10461,7 @@
         </p:nvSpPr>
         <p:spPr>
           <a:xfrm>
-            <a:off x="548640" y="3995928"/>
+            <a:off x="548640" y="3904488"/>
             <a:ext cx="256032" cy="256032"/>
           </a:xfrm>
           <a:prstGeom prst="ellipse">
@@ -10484,7 +10481,7 @@
         </p:nvSpPr>
         <p:spPr>
           <a:xfrm>
-            <a:off x="548640" y="3995928"/>
+            <a:off x="548640" y="3904488"/>
             <a:ext cx="256032" cy="256032"/>
           </a:xfrm>
           <a:prstGeom prst="rect">
@@ -10523,8 +10520,8 @@
         </p:nvSpPr>
         <p:spPr>
           <a:xfrm>
-            <a:off x="932688" y="3950208"/>
-            <a:ext cx="6172200" cy="658368"/>
+            <a:off x="932688" y="3858768"/>
+            <a:ext cx="6172200" cy="566928"/>
           </a:xfrm>
           <a:prstGeom prst="rect">
             <a:avLst/>
@@ -10582,7 +10579,7 @@
         </p:nvSpPr>
         <p:spPr>
           <a:xfrm>
-            <a:off x="548640" y="4709160"/>
+            <a:off x="548640" y="4526280"/>
             <a:ext cx="256032" cy="256032"/>
           </a:xfrm>
           <a:prstGeom prst="ellipse">
@@ -10602,7 +10599,7 @@
         </p:nvSpPr>
         <p:spPr>
           <a:xfrm>
-            <a:off x="548640" y="4709160"/>
+            <a:off x="548640" y="4526280"/>
             <a:ext cx="256032" cy="256032"/>
           </a:xfrm>
           <a:prstGeom prst="rect">
@@ -10641,7 +10638,7 @@
         </p:nvSpPr>
         <p:spPr>
           <a:xfrm>
-            <a:off x="932688" y="4663440"/>
+            <a:off x="932688" y="4480560"/>
             <a:ext cx="6172200" cy="384048"/>
           </a:xfrm>
           <a:prstGeom prst="rect">
@@ -10708,7 +10705,7 @@
         </p:blipFill>
         <p:spPr>
           <a:xfrm>
-            <a:off x="7114032" y="1664208"/>
+            <a:off x="7114032" y="1719072"/>
             <a:ext cx="4526280" cy="3392424"/>
           </a:xfrm>
           <a:prstGeom prst="rect">
@@ -10724,7 +10721,7 @@
         </p:nvSpPr>
         <p:spPr>
           <a:xfrm>
-            <a:off x="7114032" y="5102352"/>
+            <a:off x="7114032" y="5157216"/>
             <a:ext cx="4526280" cy="274320"/>
           </a:xfrm>
           <a:prstGeom prst="rect">
